--- a/Lesson 4.pptx
+++ b/Lesson 4.pptx
@@ -22,6 +22,9 @@
     <p:sldId id="257" r:id="rId16"/>
     <p:sldId id="258" r:id="rId17"/>
     <p:sldId id="259" r:id="rId18"/>
+    <p:sldId id="284" r:id="rId19"/>
+    <p:sldId id="285" r:id="rId20"/>
+    <p:sldId id="286" r:id="rId21"/>
   </p:sldIdLst>
   <p:sldSz cx="12192000" cy="6858000"/>
   <p:notesSz cx="6858000" cy="9144000"/>
@@ -15579,6 +15582,554 @@
     <p:extLst>
       <p:ext uri="{BB962C8B-B14F-4D97-AF65-F5344CB8AC3E}">
         <p14:creationId xmlns:p14="http://schemas.microsoft.com/office/powerpoint/2010/main" val="4128799282"/>
+      </p:ext>
+    </p:extLst>
+  </p:cSld>
+  <p:clrMapOvr>
+    <a:masterClrMapping/>
+  </p:clrMapOvr>
+</p:sld>
+</file>
+
+<file path=ppt/slides/slide16.xml><?xml version="1.0" encoding="utf-8"?>
+<p:sld xmlns:a="http://schemas.openxmlformats.org/drawingml/2006/main" xmlns:r="http://schemas.openxmlformats.org/officeDocument/2006/relationships" xmlns:p="http://schemas.openxmlformats.org/presentationml/2006/main">
+  <p:cSld>
+    <p:spTree>
+      <p:nvGrpSpPr>
+        <p:cNvPr id="1" name=""/>
+        <p:cNvGrpSpPr/>
+        <p:nvPr/>
+      </p:nvGrpSpPr>
+      <p:grpSpPr>
+        <a:xfrm>
+          <a:off x="0" y="0"/>
+          <a:ext cx="0" cy="0"/>
+          <a:chOff x="0" y="0"/>
+          <a:chExt cx="0" cy="0"/>
+        </a:xfrm>
+      </p:grpSpPr>
+      <p:sp>
+        <p:nvSpPr>
+          <p:cNvPr id="2" name="Title 1">
+            <a:extLst>
+              <a:ext uri="{FF2B5EF4-FFF2-40B4-BE49-F238E27FC236}">
+                <a16:creationId xmlns:a16="http://schemas.microsoft.com/office/drawing/2014/main" id="{045C82CF-5118-3173-A66C-1691698E3920}"/>
+              </a:ext>
+            </a:extLst>
+          </p:cNvPr>
+          <p:cNvSpPr>
+            <a:spLocks noGrp="1"/>
+          </p:cNvSpPr>
+          <p:nvPr>
+            <p:ph type="ctrTitle"/>
+          </p:nvPr>
+        </p:nvSpPr>
+        <p:spPr>
+          <a:xfrm>
+            <a:off x="728133" y="3015059"/>
+            <a:ext cx="9318978" cy="827881"/>
+          </a:xfrm>
+        </p:spPr>
+        <p:txBody>
+          <a:bodyPr/>
+          <a:lstStyle/>
+          <a:p>
+            <a:r>
+              <a:rPr lang="ru-RU" dirty="0"/>
+              <a:t>Тест-кейсы</a:t>
+            </a:r>
+            <a:endParaRPr lang="en-US" dirty="0"/>
+          </a:p>
+        </p:txBody>
+      </p:sp>
+    </p:spTree>
+    <p:extLst>
+      <p:ext uri="{BB962C8B-B14F-4D97-AF65-F5344CB8AC3E}">
+        <p14:creationId xmlns:p14="http://schemas.microsoft.com/office/powerpoint/2010/main" val="2700713976"/>
+      </p:ext>
+    </p:extLst>
+  </p:cSld>
+  <p:clrMapOvr>
+    <a:masterClrMapping/>
+  </p:clrMapOvr>
+</p:sld>
+</file>
+
+<file path=ppt/slides/slide17.xml><?xml version="1.0" encoding="utf-8"?>
+<p:sld xmlns:a="http://schemas.openxmlformats.org/drawingml/2006/main" xmlns:r="http://schemas.openxmlformats.org/officeDocument/2006/relationships" xmlns:p="http://schemas.openxmlformats.org/presentationml/2006/main">
+  <p:cSld>
+    <p:spTree>
+      <p:nvGrpSpPr>
+        <p:cNvPr id="1" name="">
+          <a:extLst>
+            <a:ext uri="{FF2B5EF4-FFF2-40B4-BE49-F238E27FC236}">
+              <a16:creationId xmlns:a16="http://schemas.microsoft.com/office/drawing/2014/main" id="{BED69C66-F8E3-18BB-3E43-265C3A129288}"/>
+            </a:ext>
+          </a:extLst>
+        </p:cNvPr>
+        <p:cNvGrpSpPr/>
+        <p:nvPr/>
+      </p:nvGrpSpPr>
+      <p:grpSpPr>
+        <a:xfrm>
+          <a:off x="0" y="0"/>
+          <a:ext cx="0" cy="0"/>
+          <a:chOff x="0" y="0"/>
+          <a:chExt cx="0" cy="0"/>
+        </a:xfrm>
+      </p:grpSpPr>
+      <p:sp>
+        <p:nvSpPr>
+          <p:cNvPr id="2" name="Объект 1">
+            <a:extLst>
+              <a:ext uri="{FF2B5EF4-FFF2-40B4-BE49-F238E27FC236}">
+                <a16:creationId xmlns:a16="http://schemas.microsoft.com/office/drawing/2014/main" id="{F32D381A-3023-C388-293D-7D88470651C0}"/>
+              </a:ext>
+            </a:extLst>
+          </p:cNvPr>
+          <p:cNvSpPr>
+            <a:spLocks noGrp="1"/>
+          </p:cNvSpPr>
+          <p:nvPr>
+            <p:ph idx="1"/>
+          </p:nvPr>
+        </p:nvSpPr>
+        <p:spPr>
+          <a:xfrm>
+            <a:off x="826325" y="2271156"/>
+            <a:ext cx="9908969" cy="2315688"/>
+          </a:xfrm>
+        </p:spPr>
+        <p:txBody>
+          <a:bodyPr/>
+          <a:lstStyle/>
+          <a:p>
+            <a:r>
+              <a:rPr lang="ru-RU" sz="1800" b="1" dirty="0">
+                <a:solidFill>
+                  <a:srgbClr val="6B8F78"/>
+                </a:solidFill>
+              </a:rPr>
+              <a:t>Особенности</a:t>
+            </a:r>
+            <a:r>
+              <a:rPr lang="ru-RU" sz="1600" dirty="0">
+                <a:solidFill>
+                  <a:srgbClr val="6B8F78"/>
+                </a:solidFill>
+              </a:rPr>
+              <a:t>:</a:t>
+            </a:r>
+          </a:p>
+          <a:p>
+            <a:pPr marL="342900" indent="-342900">
+              <a:buFont typeface="Arial" panose="020B0604020202020204" pitchFamily="34" charset="0"/>
+              <a:buChar char="•"/>
+            </a:pPr>
+            <a:r>
+              <a:rPr lang="ru-RU" sz="1600" dirty="0">
+                <a:solidFill>
+                  <a:srgbClr val="6B8F78"/>
+                </a:solidFill>
+              </a:rPr>
+              <a:t>Проверка начинается с существительного/ отглагольного существительного</a:t>
+            </a:r>
+          </a:p>
+          <a:p>
+            <a:pPr marL="342900" indent="-342900">
+              <a:buFont typeface="Arial" panose="020B0604020202020204" pitchFamily="34" charset="0"/>
+              <a:buChar char="•"/>
+            </a:pPr>
+            <a:r>
+              <a:rPr lang="ru-RU" sz="1600" dirty="0">
+                <a:solidFill>
+                  <a:srgbClr val="6B8F78"/>
+                </a:solidFill>
+              </a:rPr>
+              <a:t>Шаг – это конкретное действие, которое необходимо выполнить: перейти, нажать, ввести..</a:t>
+            </a:r>
+          </a:p>
+          <a:p>
+            <a:pPr marL="342900" indent="-342900">
+              <a:buFont typeface="Arial" panose="020B0604020202020204" pitchFamily="34" charset="0"/>
+              <a:buChar char="•"/>
+            </a:pPr>
+            <a:r>
+              <a:rPr lang="ru-RU" sz="1600" dirty="0">
+                <a:solidFill>
+                  <a:srgbClr val="6B8F78"/>
+                </a:solidFill>
+              </a:rPr>
+              <a:t>Результат – это законченное действие, результат шага: отобразился поп-ап, отобразилось сообщение об успешной регистрации с информацией…, произошел переход на страницу.. .</a:t>
+            </a:r>
+          </a:p>
+          <a:p>
+            <a:pPr marL="342900" indent="-342900">
+              <a:buFont typeface="Arial" panose="020B0604020202020204" pitchFamily="34" charset="0"/>
+              <a:buChar char="•"/>
+            </a:pPr>
+            <a:r>
+              <a:rPr lang="ru-RU" sz="1600" dirty="0">
+                <a:solidFill>
+                  <a:srgbClr val="6B8F78"/>
+                </a:solidFill>
+              </a:rPr>
+              <a:t>Присутствует группировка</a:t>
+            </a:r>
+          </a:p>
+        </p:txBody>
+      </p:sp>
+      <p:sp>
+        <p:nvSpPr>
+          <p:cNvPr id="4" name="Текст 3">
+            <a:extLst>
+              <a:ext uri="{FF2B5EF4-FFF2-40B4-BE49-F238E27FC236}">
+                <a16:creationId xmlns:a16="http://schemas.microsoft.com/office/drawing/2014/main" id="{2F3D5F2A-0F50-BC44-8CB3-A7F78F8CD247}"/>
+              </a:ext>
+            </a:extLst>
+          </p:cNvPr>
+          <p:cNvSpPr>
+            <a:spLocks noGrp="1"/>
+          </p:cNvSpPr>
+          <p:nvPr>
+            <p:ph type="body" sz="quarter" idx="10"/>
+          </p:nvPr>
+        </p:nvSpPr>
+        <p:spPr>
+          <a:xfrm>
+            <a:off x="11472583" y="6176963"/>
+            <a:ext cx="569913" cy="528637"/>
+          </a:xfrm>
+        </p:spPr>
+        <p:txBody>
+          <a:bodyPr/>
+          <a:lstStyle/>
+          <a:p>
+            <a:r>
+              <a:rPr lang="en-US" dirty="0"/>
+              <a:t>1</a:t>
+            </a:r>
+            <a:r>
+              <a:rPr lang="ru-RU" dirty="0"/>
+              <a:t>5</a:t>
+            </a:r>
+            <a:endParaRPr lang="ru-UA" dirty="0"/>
+          </a:p>
+        </p:txBody>
+      </p:sp>
+    </p:spTree>
+    <p:extLst>
+      <p:ext uri="{BB962C8B-B14F-4D97-AF65-F5344CB8AC3E}">
+        <p14:creationId xmlns:p14="http://schemas.microsoft.com/office/powerpoint/2010/main" val="3858672560"/>
+      </p:ext>
+    </p:extLst>
+  </p:cSld>
+  <p:clrMapOvr>
+    <a:masterClrMapping/>
+  </p:clrMapOvr>
+</p:sld>
+</file>
+
+<file path=ppt/slides/slide18.xml><?xml version="1.0" encoding="utf-8"?>
+<p:sld xmlns:a="http://schemas.openxmlformats.org/drawingml/2006/main" xmlns:r="http://schemas.openxmlformats.org/officeDocument/2006/relationships" xmlns:p="http://schemas.openxmlformats.org/presentationml/2006/main">
+  <p:cSld>
+    <p:spTree>
+      <p:nvGrpSpPr>
+        <p:cNvPr id="1" name="">
+          <a:extLst>
+            <a:ext uri="{FF2B5EF4-FFF2-40B4-BE49-F238E27FC236}">
+              <a16:creationId xmlns:a16="http://schemas.microsoft.com/office/drawing/2014/main" id="{843868E4-063B-7609-6682-C7876FCE0AE4}"/>
+            </a:ext>
+          </a:extLst>
+        </p:cNvPr>
+        <p:cNvGrpSpPr/>
+        <p:nvPr/>
+      </p:nvGrpSpPr>
+      <p:grpSpPr>
+        <a:xfrm>
+          <a:off x="0" y="0"/>
+          <a:ext cx="0" cy="0"/>
+          <a:chOff x="0" y="0"/>
+          <a:chExt cx="0" cy="0"/>
+        </a:xfrm>
+      </p:grpSpPr>
+      <p:sp>
+        <p:nvSpPr>
+          <p:cNvPr id="2" name="Объект 1">
+            <a:extLst>
+              <a:ext uri="{FF2B5EF4-FFF2-40B4-BE49-F238E27FC236}">
+                <a16:creationId xmlns:a16="http://schemas.microsoft.com/office/drawing/2014/main" id="{044A4D56-7C9F-F237-93D7-B77FCD095567}"/>
+              </a:ext>
+            </a:extLst>
+          </p:cNvPr>
+          <p:cNvSpPr>
+            <a:spLocks noGrp="1"/>
+          </p:cNvSpPr>
+          <p:nvPr>
+            <p:ph idx="1"/>
+          </p:nvPr>
+        </p:nvSpPr>
+        <p:spPr>
+          <a:xfrm>
+            <a:off x="826325" y="1113311"/>
+            <a:ext cx="9908969" cy="5063652"/>
+          </a:xfrm>
+        </p:spPr>
+        <p:txBody>
+          <a:bodyPr/>
+          <a:lstStyle/>
+          <a:p>
+            <a:r>
+              <a:rPr lang="ru-RU" sz="1800" b="1" dirty="0">
+                <a:solidFill>
+                  <a:srgbClr val="6B8F78"/>
+                </a:solidFill>
+              </a:rPr>
+              <a:t>Структура</a:t>
+            </a:r>
+            <a:r>
+              <a:rPr lang="ru-RU" sz="1600" dirty="0">
+                <a:solidFill>
+                  <a:srgbClr val="6B8F78"/>
+                </a:solidFill>
+              </a:rPr>
+              <a:t>:</a:t>
+            </a:r>
+          </a:p>
+          <a:p>
+            <a:pPr marL="285750" indent="-285750">
+              <a:buFont typeface="Arial" panose="020B0604020202020204" pitchFamily="34" charset="0"/>
+              <a:buChar char="•"/>
+            </a:pPr>
+            <a:r>
+              <a:rPr lang="en-US" sz="1600" dirty="0">
+                <a:solidFill>
+                  <a:srgbClr val="6B8F78"/>
+                </a:solidFill>
+              </a:rPr>
+              <a:t>ID</a:t>
+            </a:r>
+          </a:p>
+          <a:p>
+            <a:pPr marL="285750" indent="-285750">
+              <a:buFont typeface="Arial" panose="020B0604020202020204" pitchFamily="34" charset="0"/>
+              <a:buChar char="•"/>
+            </a:pPr>
+            <a:r>
+              <a:rPr lang="ru-RU" sz="1600" dirty="0">
+                <a:solidFill>
+                  <a:srgbClr val="6B8F78"/>
+                </a:solidFill>
+              </a:rPr>
+              <a:t>Название</a:t>
+            </a:r>
+          </a:p>
+          <a:p>
+            <a:pPr marL="285750" indent="-285750">
+              <a:buFont typeface="Arial" panose="020B0604020202020204" pitchFamily="34" charset="0"/>
+              <a:buChar char="•"/>
+            </a:pPr>
+            <a:r>
+              <a:rPr lang="ru-RU" sz="1600" dirty="0">
+                <a:solidFill>
+                  <a:srgbClr val="6B8F78"/>
+                </a:solidFill>
+              </a:rPr>
+              <a:t>Предусловие</a:t>
+            </a:r>
+          </a:p>
+          <a:p>
+            <a:pPr marL="285750" indent="-285750">
+              <a:buFont typeface="Arial" panose="020B0604020202020204" pitchFamily="34" charset="0"/>
+              <a:buChar char="•"/>
+            </a:pPr>
+            <a:r>
+              <a:rPr lang="ru-RU" sz="1600" dirty="0">
+                <a:solidFill>
+                  <a:srgbClr val="6B8F78"/>
+                </a:solidFill>
+              </a:rPr>
+              <a:t>Шаги</a:t>
+            </a:r>
+          </a:p>
+          <a:p>
+            <a:pPr marL="285750" indent="-285750">
+              <a:buFont typeface="Arial" panose="020B0604020202020204" pitchFamily="34" charset="0"/>
+              <a:buChar char="•"/>
+            </a:pPr>
+            <a:r>
+              <a:rPr lang="ru-RU" sz="1600" dirty="0">
+                <a:solidFill>
+                  <a:srgbClr val="6B8F78"/>
+                </a:solidFill>
+              </a:rPr>
+              <a:t>ОР (ожидаемый результат)</a:t>
+            </a:r>
+          </a:p>
+          <a:p>
+            <a:pPr marL="285750" indent="-285750">
+              <a:buFont typeface="Arial" panose="020B0604020202020204" pitchFamily="34" charset="0"/>
+              <a:buChar char="•"/>
+            </a:pPr>
+            <a:r>
+              <a:rPr lang="ru-RU" sz="1600" dirty="0">
+                <a:solidFill>
+                  <a:srgbClr val="6B8F78"/>
+                </a:solidFill>
+              </a:rPr>
+              <a:t>АР (актуальный результат)</a:t>
+            </a:r>
+          </a:p>
+          <a:p>
+            <a:pPr marL="285750" indent="-285750">
+              <a:buFont typeface="Arial" panose="020B0604020202020204" pitchFamily="34" charset="0"/>
+              <a:buChar char="•"/>
+            </a:pPr>
+            <a:r>
+              <a:rPr lang="ru-RU" sz="1600" dirty="0">
+                <a:solidFill>
+                  <a:srgbClr val="6B8F78"/>
+                </a:solidFill>
+              </a:rPr>
+              <a:t>Комментарии</a:t>
+            </a:r>
+          </a:p>
+          <a:p>
+            <a:pPr marL="285750" indent="-285750">
+              <a:buFont typeface="Arial" panose="020B0604020202020204" pitchFamily="34" charset="0"/>
+              <a:buChar char="•"/>
+            </a:pPr>
+            <a:endParaRPr lang="ru-RU" sz="1600" dirty="0">
+              <a:solidFill>
+                <a:srgbClr val="6B8F78"/>
+              </a:solidFill>
+            </a:endParaRPr>
+          </a:p>
+          <a:p>
+            <a:pPr marL="285750" indent="-285750">
+              <a:buFont typeface="Arial" panose="020B0604020202020204" pitchFamily="34" charset="0"/>
+              <a:buChar char="•"/>
+            </a:pPr>
+            <a:r>
+              <a:rPr lang="ru-RU" sz="1600" dirty="0">
+                <a:solidFill>
+                  <a:srgbClr val="6B8F78"/>
+                </a:solidFill>
+              </a:rPr>
+              <a:t>Лейблы</a:t>
+            </a:r>
+          </a:p>
+          <a:p>
+            <a:pPr marL="285750" indent="-285750">
+              <a:buFont typeface="Arial" panose="020B0604020202020204" pitchFamily="34" charset="0"/>
+              <a:buChar char="•"/>
+            </a:pPr>
+            <a:r>
+              <a:rPr lang="ru-RU" sz="1600" dirty="0">
+                <a:solidFill>
+                  <a:srgbClr val="6B8F78"/>
+                </a:solidFill>
+              </a:rPr>
+              <a:t>Окружение</a:t>
+            </a:r>
+          </a:p>
+          <a:p>
+            <a:pPr marL="285750" indent="-285750">
+              <a:buFont typeface="Arial" panose="020B0604020202020204" pitchFamily="34" charset="0"/>
+              <a:buChar char="•"/>
+            </a:pPr>
+            <a:r>
+              <a:rPr lang="ru-RU" sz="1600" dirty="0">
+                <a:solidFill>
+                  <a:srgbClr val="6B8F78"/>
+                </a:solidFill>
+              </a:rPr>
+              <a:t>Автоматизация</a:t>
+            </a:r>
+          </a:p>
+          <a:p>
+            <a:pPr marL="285750" indent="-285750">
+              <a:buFont typeface="Arial" panose="020B0604020202020204" pitchFamily="34" charset="0"/>
+              <a:buChar char="•"/>
+            </a:pPr>
+            <a:r>
+              <a:rPr lang="ru-RU" sz="1600" dirty="0">
+                <a:solidFill>
+                  <a:srgbClr val="6B8F78"/>
+                </a:solidFill>
+              </a:rPr>
+              <a:t>Статус</a:t>
+            </a:r>
+          </a:p>
+          <a:p>
+            <a:pPr marL="285750" indent="-285750">
+              <a:buFont typeface="Arial" panose="020B0604020202020204" pitchFamily="34" charset="0"/>
+              <a:buChar char="•"/>
+            </a:pPr>
+            <a:r>
+              <a:rPr lang="ru-RU" sz="1600" dirty="0">
+                <a:solidFill>
+                  <a:srgbClr val="6B8F78"/>
+                </a:solidFill>
+              </a:rPr>
+              <a:t>И др.</a:t>
+            </a:r>
+          </a:p>
+          <a:p>
+            <a:pPr marL="342900" indent="-342900">
+              <a:buFont typeface="Arial" panose="020B0604020202020204" pitchFamily="34" charset="0"/>
+              <a:buChar char="•"/>
+            </a:pPr>
+            <a:endParaRPr lang="ru-RU" sz="1600" dirty="0">
+              <a:solidFill>
+                <a:srgbClr val="6B8F78"/>
+              </a:solidFill>
+            </a:endParaRPr>
+          </a:p>
+        </p:txBody>
+      </p:sp>
+      <p:sp>
+        <p:nvSpPr>
+          <p:cNvPr id="4" name="Текст 3">
+            <a:extLst>
+              <a:ext uri="{FF2B5EF4-FFF2-40B4-BE49-F238E27FC236}">
+                <a16:creationId xmlns:a16="http://schemas.microsoft.com/office/drawing/2014/main" id="{7B313DC6-0B1F-4C3B-389D-86FC8A0C43BF}"/>
+              </a:ext>
+            </a:extLst>
+          </p:cNvPr>
+          <p:cNvSpPr>
+            <a:spLocks noGrp="1"/>
+          </p:cNvSpPr>
+          <p:nvPr>
+            <p:ph type="body" sz="quarter" idx="10"/>
+          </p:nvPr>
+        </p:nvSpPr>
+        <p:spPr>
+          <a:xfrm>
+            <a:off x="11472583" y="6176963"/>
+            <a:ext cx="569913" cy="528637"/>
+          </a:xfrm>
+        </p:spPr>
+        <p:txBody>
+          <a:bodyPr/>
+          <a:lstStyle/>
+          <a:p>
+            <a:r>
+              <a:rPr lang="en-US" dirty="0"/>
+              <a:t>1</a:t>
+            </a:r>
+            <a:r>
+              <a:rPr lang="ru-RU" dirty="0"/>
+              <a:t>6</a:t>
+            </a:r>
+            <a:endParaRPr lang="ru-UA" dirty="0"/>
+          </a:p>
+        </p:txBody>
+      </p:sp>
+    </p:spTree>
+    <p:extLst>
+      <p:ext uri="{BB962C8B-B14F-4D97-AF65-F5344CB8AC3E}">
+        <p14:creationId xmlns:p14="http://schemas.microsoft.com/office/powerpoint/2010/main" val="2390917500"/>
       </p:ext>
     </p:extLst>
   </p:cSld>
